--- a/docs/output/zed-x-mini-jetson.pptx
+++ b/docs/output/zed-x-mini-jetson.pptx
@@ -6056,7 +6056,7 @@
               </a:defRPr>
             </a:pPr>
             <a:r>
-              <a:t>📝 블로그: techblips.com/study/zed-x-mini-jetson-setup</a:t>
+              <a:t>📝 블로그: 0xhenry.dev/study/zed-x-mini-jetson-setup</a:t>
             </a:r>
           </a:p>
         </p:txBody>
